--- a/assets/powerpoints/module-vetements/B1-dans-la-cabine-d-essayage.pptx
+++ b/assets/powerpoints/module-vetements/B1-dans-la-cabine-d-essayage.pptx
@@ -12384,7 +12384,25 @@
                 </a:solidFill>
                 <a:latin typeface="Verdana"/>
               </a:rPr>
-              <a:t>Dire « ça ne va pas » oblige la personne à deviner. Dire l'adjectif et l'endroit lui permet de proposer une autre &lt;b&gt;coupe&lt;/b&gt;, pas seulement une autre taille. C'est la différence entre trois essais et dix.</a:t>
+              <a:t>Dire « ça ne va pas » oblige la personne à deviner. Dire l'adjectif et l'endroit lui permet de proposer une autre </a:t>
+            </a:r>
+            <a:r>
+              <a:rPr sz="2000" b="1" i="0">
+                <a:solidFill>
+                  <a:srgbClr val="4B4F52"/>
+                </a:solidFill>
+                <a:latin typeface="Verdana"/>
+              </a:rPr>
+              <a:t>coupe</a:t>
+            </a:r>
+            <a:r>
+              <a:rPr sz="2000" b="0" i="0">
+                <a:solidFill>
+                  <a:srgbClr val="4B4F52"/>
+                </a:solidFill>
+                <a:latin typeface="Verdana"/>
+              </a:rPr>
+              <a:t>, pas seulement une autre taille. C'est la différence entre trois essais et dix.</a:t>
             </a:r>
           </a:p>
         </p:txBody>
